--- a/RO - Discovery BLONDERA Pro System - slide-uri individuale.pptx
+++ b/RO - Discovery BLONDERA Pro System - slide-uri individuale.pptx
@@ -2291,9 +2291,6 @@
               <a:t>Mod de utilizare:</a:t>
             </a:r>
             <a:br/>
-            <a:pPr indent="0" marL="0">
-              <a:buNone/>
-            </a:pPr>
             <a:r>
               <a:rPr lang="en-US" sz="1400" dirty="0">
                 <a:solidFill>
